--- a/assets/powerpoints/module-meteo/B2-les-chiffres-du-bulletin.pptx
+++ b/assets/powerpoints/module-meteo/B2-les-chiffres-du-bulletin.pptx
@@ -4649,7 +4649,7 @@
                 </a:solidFill>
                 <a:latin typeface="Verdana"/>
               </a:rPr>
-              <a:t>SÉANCE B2  ·  MODULE 6</a:t>
+              <a:t>SÉANCE B2  ·  MODULE 7</a:t>
             </a:r>
           </a:p>
         </p:txBody>

--- a/assets/powerpoints/module-meteo/B2-les-chiffres-du-bulletin.pptx
+++ b/assets/powerpoints/module-meteo/B2-les-chiffres-du-bulletin.pptx
@@ -4645,7 +4645,7 @@
             <a:r>
               <a:rPr sz="1300" b="1" i="0" spc="156">
                 <a:solidFill>
-                  <a:srgbClr val="166534"/>
+                  <a:srgbClr val="A5335F"/>
                 </a:solidFill>
                 <a:latin typeface="Verdana"/>
               </a:rPr>
@@ -4985,7 +4985,7 @@
             <a:r>
               <a:rPr sz="1300" b="1" i="0" spc="156">
                 <a:solidFill>
-                  <a:srgbClr val="166534"/>
+                  <a:srgbClr val="A5335F"/>
                 </a:solidFill>
                 <a:latin typeface="Verdana"/>
               </a:rPr>
@@ -5534,7 +5534,7 @@
             <a:r>
               <a:rPr sz="1300" b="1" i="0" spc="156">
                 <a:solidFill>
-                  <a:srgbClr val="166534"/>
+                  <a:srgbClr val="A5335F"/>
                 </a:solidFill>
                 <a:latin typeface="Verdana"/>
               </a:rPr>
@@ -6083,7 +6083,7 @@
             <a:r>
               <a:rPr sz="1300" b="1" i="0" spc="156">
                 <a:solidFill>
-                  <a:srgbClr val="166534"/>
+                  <a:srgbClr val="A5335F"/>
                 </a:solidFill>
                 <a:latin typeface="Verdana"/>
               </a:rPr>
@@ -6233,7 +6233,7 @@
             </a:avLst>
           </a:prstGeom>
           <a:solidFill>
-            <a:srgbClr val="E3F1E7"/>
+            <a:srgbClr val="FCE9F0"/>
           </a:solidFill>
           <a:ln>
             <a:noFill/>
@@ -6290,7 +6290,7 @@
             <a:r>
               <a:rPr sz="1500" b="1" i="0">
                 <a:solidFill>
-                  <a:srgbClr val="166534"/>
+                  <a:srgbClr val="A5335F"/>
                 </a:solidFill>
                 <a:latin typeface="Verdana"/>
               </a:rPr>
@@ -6401,7 +6401,7 @@
             </a:avLst>
           </a:prstGeom>
           <a:solidFill>
-            <a:srgbClr val="E3F1E7"/>
+            <a:srgbClr val="FCE9F0"/>
           </a:solidFill>
           <a:ln>
             <a:noFill/>
@@ -6458,7 +6458,7 @@
             <a:r>
               <a:rPr sz="1500" b="1" i="0">
                 <a:solidFill>
-                  <a:srgbClr val="166534"/>
+                  <a:srgbClr val="A5335F"/>
                 </a:solidFill>
                 <a:latin typeface="Verdana"/>
               </a:rPr>
@@ -6569,7 +6569,7 @@
             </a:avLst>
           </a:prstGeom>
           <a:solidFill>
-            <a:srgbClr val="E3F1E7"/>
+            <a:srgbClr val="FCE9F0"/>
           </a:solidFill>
           <a:ln>
             <a:noFill/>
@@ -6626,7 +6626,7 @@
             <a:r>
               <a:rPr sz="1500" b="1" i="0">
                 <a:solidFill>
-                  <a:srgbClr val="166534"/>
+                  <a:srgbClr val="A5335F"/>
                 </a:solidFill>
                 <a:latin typeface="Verdana"/>
               </a:rPr>
@@ -6737,7 +6737,7 @@
             </a:avLst>
           </a:prstGeom>
           <a:solidFill>
-            <a:srgbClr val="E3F1E7"/>
+            <a:srgbClr val="FCE9F0"/>
           </a:solidFill>
           <a:ln>
             <a:noFill/>
@@ -6794,7 +6794,7 @@
             <a:r>
               <a:rPr sz="1500" b="1" i="0">
                 <a:solidFill>
-                  <a:srgbClr val="166534"/>
+                  <a:srgbClr val="A5335F"/>
                 </a:solidFill>
                 <a:latin typeface="Verdana"/>
               </a:rPr>
@@ -6905,7 +6905,7 @@
             </a:avLst>
           </a:prstGeom>
           <a:solidFill>
-            <a:srgbClr val="E3F1E7"/>
+            <a:srgbClr val="FCE9F0"/>
           </a:solidFill>
           <a:ln>
             <a:noFill/>
@@ -6962,7 +6962,7 @@
             <a:r>
               <a:rPr sz="1500" b="1" i="0">
                 <a:solidFill>
-                  <a:srgbClr val="166534"/>
+                  <a:srgbClr val="A5335F"/>
                 </a:solidFill>
                 <a:latin typeface="Verdana"/>
               </a:rPr>
@@ -7178,7 +7178,7 @@
             <a:r>
               <a:rPr sz="1300" b="1" i="0" spc="156">
                 <a:solidFill>
-                  <a:srgbClr val="166534"/>
+                  <a:srgbClr val="A5335F"/>
                 </a:solidFill>
                 <a:latin typeface="Verdana"/>
               </a:rPr>
@@ -7328,7 +7328,7 @@
             </a:avLst>
           </a:prstGeom>
           <a:solidFill>
-            <a:srgbClr val="E3F1E7"/>
+            <a:srgbClr val="FCE9F0"/>
           </a:solidFill>
           <a:ln>
             <a:noFill/>
@@ -7385,7 +7385,7 @@
             <a:r>
               <a:rPr sz="1500" b="1" i="0">
                 <a:solidFill>
-                  <a:srgbClr val="166534"/>
+                  <a:srgbClr val="A5335F"/>
                 </a:solidFill>
                 <a:latin typeface="Verdana"/>
               </a:rPr>
@@ -7505,7 +7505,7 @@
             </a:avLst>
           </a:prstGeom>
           <a:solidFill>
-            <a:srgbClr val="E3F1E7"/>
+            <a:srgbClr val="FCE9F0"/>
           </a:solidFill>
           <a:ln>
             <a:noFill/>
@@ -7562,7 +7562,7 @@
             <a:r>
               <a:rPr sz="1500" b="1" i="0">
                 <a:solidFill>
-                  <a:srgbClr val="166534"/>
+                  <a:srgbClr val="A5335F"/>
                 </a:solidFill>
                 <a:latin typeface="Verdana"/>
               </a:rPr>
@@ -7682,7 +7682,7 @@
             </a:avLst>
           </a:prstGeom>
           <a:solidFill>
-            <a:srgbClr val="E3F1E7"/>
+            <a:srgbClr val="FCE9F0"/>
           </a:solidFill>
           <a:ln>
             <a:noFill/>
@@ -7739,7 +7739,7 @@
             <a:r>
               <a:rPr sz="1500" b="1" i="0">
                 <a:solidFill>
-                  <a:srgbClr val="166534"/>
+                  <a:srgbClr val="A5335F"/>
                 </a:solidFill>
                 <a:latin typeface="Verdana"/>
               </a:rPr>
@@ -7859,7 +7859,7 @@
             </a:avLst>
           </a:prstGeom>
           <a:solidFill>
-            <a:srgbClr val="E3F1E7"/>
+            <a:srgbClr val="FCE9F0"/>
           </a:solidFill>
           <a:ln>
             <a:noFill/>
@@ -7916,7 +7916,7 @@
             <a:r>
               <a:rPr sz="1500" b="1" i="0">
                 <a:solidFill>
-                  <a:srgbClr val="166534"/>
+                  <a:srgbClr val="A5335F"/>
                 </a:solidFill>
                 <a:latin typeface="Verdana"/>
               </a:rPr>
@@ -8036,7 +8036,7 @@
             </a:avLst>
           </a:prstGeom>
           <a:solidFill>
-            <a:srgbClr val="E3F1E7"/>
+            <a:srgbClr val="FCE9F0"/>
           </a:solidFill>
           <a:ln>
             <a:noFill/>
@@ -8093,7 +8093,7 @@
             <a:r>
               <a:rPr sz="1500" b="1" i="0">
                 <a:solidFill>
-                  <a:srgbClr val="166534"/>
+                  <a:srgbClr val="A5335F"/>
                 </a:solidFill>
                 <a:latin typeface="Verdana"/>
               </a:rPr>
@@ -8318,7 +8318,7 @@
             <a:r>
               <a:rPr sz="1300" b="1" i="0" spc="156">
                 <a:solidFill>
-                  <a:srgbClr val="166534"/>
+                  <a:srgbClr val="A5335F"/>
                 </a:solidFill>
                 <a:latin typeface="Verdana"/>
               </a:rPr>
@@ -8468,7 +8468,7 @@
             </a:avLst>
           </a:prstGeom>
           <a:solidFill>
-            <a:srgbClr val="E3F1E7"/>
+            <a:srgbClr val="FCE9F0"/>
           </a:solidFill>
           <a:ln>
             <a:noFill/>
@@ -8525,7 +8525,7 @@
             <a:r>
               <a:rPr sz="1500" b="1" i="0">
                 <a:solidFill>
-                  <a:srgbClr val="166534"/>
+                  <a:srgbClr val="A5335F"/>
                 </a:solidFill>
                 <a:latin typeface="Verdana"/>
               </a:rPr>
@@ -8636,7 +8636,7 @@
             </a:avLst>
           </a:prstGeom>
           <a:solidFill>
-            <a:srgbClr val="E3F1E7"/>
+            <a:srgbClr val="FCE9F0"/>
           </a:solidFill>
           <a:ln>
             <a:noFill/>
@@ -8693,7 +8693,7 @@
             <a:r>
               <a:rPr sz="1500" b="1" i="0">
                 <a:solidFill>
-                  <a:srgbClr val="166534"/>
+                  <a:srgbClr val="A5335F"/>
                 </a:solidFill>
                 <a:latin typeface="Verdana"/>
               </a:rPr>
@@ -8804,7 +8804,7 @@
             </a:avLst>
           </a:prstGeom>
           <a:solidFill>
-            <a:srgbClr val="E3F1E7"/>
+            <a:srgbClr val="FCE9F0"/>
           </a:solidFill>
           <a:ln>
             <a:noFill/>
@@ -8861,7 +8861,7 @@
             <a:r>
               <a:rPr sz="1500" b="1" i="0">
                 <a:solidFill>
-                  <a:srgbClr val="166534"/>
+                  <a:srgbClr val="A5335F"/>
                 </a:solidFill>
                 <a:latin typeface="Verdana"/>
               </a:rPr>
@@ -8972,7 +8972,7 @@
             </a:avLst>
           </a:prstGeom>
           <a:solidFill>
-            <a:srgbClr val="E3F1E7"/>
+            <a:srgbClr val="FCE9F0"/>
           </a:solidFill>
           <a:ln>
             <a:noFill/>
@@ -9029,7 +9029,7 @@
             <a:r>
               <a:rPr sz="1500" b="1" i="0">
                 <a:solidFill>
-                  <a:srgbClr val="166534"/>
+                  <a:srgbClr val="A5335F"/>
                 </a:solidFill>
                 <a:latin typeface="Verdana"/>
               </a:rPr>
@@ -9245,7 +9245,7 @@
             <a:r>
               <a:rPr sz="1300" b="1" i="0" spc="156">
                 <a:solidFill>
-                  <a:srgbClr val="166534"/>
+                  <a:srgbClr val="A5335F"/>
                 </a:solidFill>
                 <a:latin typeface="Verdana"/>
               </a:rPr>
@@ -9395,7 +9395,7 @@
             </a:avLst>
           </a:prstGeom>
           <a:solidFill>
-            <a:srgbClr val="E3F1E7"/>
+            <a:srgbClr val="FCE9F0"/>
           </a:solidFill>
           <a:ln>
             <a:noFill/>
@@ -9452,7 +9452,7 @@
             <a:r>
               <a:rPr sz="1500" b="1" i="0">
                 <a:solidFill>
-                  <a:srgbClr val="166534"/>
+                  <a:srgbClr val="A5335F"/>
                 </a:solidFill>
                 <a:latin typeface="Verdana"/>
               </a:rPr>
@@ -9572,7 +9572,7 @@
             </a:avLst>
           </a:prstGeom>
           <a:solidFill>
-            <a:srgbClr val="E3F1E7"/>
+            <a:srgbClr val="FCE9F0"/>
           </a:solidFill>
           <a:ln>
             <a:noFill/>
@@ -9629,7 +9629,7 @@
             <a:r>
               <a:rPr sz="1500" b="1" i="0">
                 <a:solidFill>
-                  <a:srgbClr val="166534"/>
+                  <a:srgbClr val="A5335F"/>
                 </a:solidFill>
                 <a:latin typeface="Verdana"/>
               </a:rPr>
@@ -9749,7 +9749,7 @@
             </a:avLst>
           </a:prstGeom>
           <a:solidFill>
-            <a:srgbClr val="E3F1E7"/>
+            <a:srgbClr val="FCE9F0"/>
           </a:solidFill>
           <a:ln>
             <a:noFill/>
@@ -9806,7 +9806,7 @@
             <a:r>
               <a:rPr sz="1500" b="1" i="0">
                 <a:solidFill>
-                  <a:srgbClr val="166534"/>
+                  <a:srgbClr val="A5335F"/>
                 </a:solidFill>
                 <a:latin typeface="Verdana"/>
               </a:rPr>
@@ -9926,7 +9926,7 @@
             </a:avLst>
           </a:prstGeom>
           <a:solidFill>
-            <a:srgbClr val="E3F1E7"/>
+            <a:srgbClr val="FCE9F0"/>
           </a:solidFill>
           <a:ln>
             <a:noFill/>
@@ -9983,7 +9983,7 @@
             <a:r>
               <a:rPr sz="1500" b="1" i="0">
                 <a:solidFill>
-                  <a:srgbClr val="166534"/>
+                  <a:srgbClr val="A5335F"/>
                 </a:solidFill>
                 <a:latin typeface="Verdana"/>
               </a:rPr>
@@ -10671,7 +10671,7 @@
             <a:r>
               <a:rPr sz="1300" b="1" i="0" spc="156">
                 <a:solidFill>
-                  <a:srgbClr val="166534"/>
+                  <a:srgbClr val="A5335F"/>
                 </a:solidFill>
                 <a:latin typeface="Verdana"/>
               </a:rPr>
@@ -10782,7 +10782,7 @@
             </a:avLst>
           </a:prstGeom>
           <a:solidFill>
-            <a:srgbClr val="E3F1E7"/>
+            <a:srgbClr val="FCE9F0"/>
           </a:solidFill>
           <a:ln>
             <a:noFill/>
@@ -10839,7 +10839,7 @@
             <a:r>
               <a:rPr sz="1500" b="1" i="0">
                 <a:solidFill>
-                  <a:srgbClr val="166534"/>
+                  <a:srgbClr val="A5335F"/>
                 </a:solidFill>
                 <a:latin typeface="Verdana"/>
               </a:rPr>
@@ -10950,7 +10950,7 @@
             </a:avLst>
           </a:prstGeom>
           <a:solidFill>
-            <a:srgbClr val="E3F1E7"/>
+            <a:srgbClr val="FCE9F0"/>
           </a:solidFill>
           <a:ln>
             <a:noFill/>
@@ -11007,7 +11007,7 @@
             <a:r>
               <a:rPr sz="1500" b="1" i="0">
                 <a:solidFill>
-                  <a:srgbClr val="166534"/>
+                  <a:srgbClr val="A5335F"/>
                 </a:solidFill>
                 <a:latin typeface="Verdana"/>
               </a:rPr>
@@ -11118,7 +11118,7 @@
             </a:avLst>
           </a:prstGeom>
           <a:solidFill>
-            <a:srgbClr val="E3F1E7"/>
+            <a:srgbClr val="FCE9F0"/>
           </a:solidFill>
           <a:ln>
             <a:noFill/>
@@ -11175,7 +11175,7 @@
             <a:r>
               <a:rPr sz="1500" b="1" i="0">
                 <a:solidFill>
-                  <a:srgbClr val="166534"/>
+                  <a:srgbClr val="A5335F"/>
                 </a:solidFill>
                 <a:latin typeface="Verdana"/>
               </a:rPr>
@@ -11286,7 +11286,7 @@
             </a:avLst>
           </a:prstGeom>
           <a:solidFill>
-            <a:srgbClr val="E3F1E7"/>
+            <a:srgbClr val="FCE9F0"/>
           </a:solidFill>
           <a:ln>
             <a:noFill/>
@@ -11343,7 +11343,7 @@
             <a:r>
               <a:rPr sz="1500" b="1" i="0">
                 <a:solidFill>
-                  <a:srgbClr val="166534"/>
+                  <a:srgbClr val="A5335F"/>
                 </a:solidFill>
                 <a:latin typeface="Verdana"/>
               </a:rPr>
@@ -11559,7 +11559,7 @@
             <a:r>
               <a:rPr sz="1300" b="1" i="0" spc="156">
                 <a:solidFill>
-                  <a:srgbClr val="166534"/>
+                  <a:srgbClr val="A5335F"/>
                 </a:solidFill>
                 <a:latin typeface="Verdana"/>
               </a:rPr>
@@ -11839,7 +11839,7 @@
             <a:r>
               <a:rPr sz="1800" b="1" i="0">
                 <a:solidFill>
-                  <a:srgbClr val="166534"/>
+                  <a:srgbClr val="A5335F"/>
                 </a:solidFill>
                 <a:latin typeface="Verdana"/>
               </a:rPr>
@@ -11998,7 +11998,7 @@
             <a:r>
               <a:rPr sz="1800" b="1" i="0">
                 <a:solidFill>
-                  <a:srgbClr val="166534"/>
+                  <a:srgbClr val="A5335F"/>
                 </a:solidFill>
                 <a:latin typeface="Verdana"/>
               </a:rPr>
@@ -12157,7 +12157,7 @@
             <a:r>
               <a:rPr sz="1800" b="1" i="0">
                 <a:solidFill>
-                  <a:srgbClr val="166534"/>
+                  <a:srgbClr val="A5335F"/>
                 </a:solidFill>
                 <a:latin typeface="Verdana"/>
               </a:rPr>
@@ -12316,7 +12316,7 @@
             <a:r>
               <a:rPr sz="1800" b="1" i="0">
                 <a:solidFill>
-                  <a:srgbClr val="166534"/>
+                  <a:srgbClr val="A5335F"/>
                 </a:solidFill>
                 <a:latin typeface="Verdana"/>
               </a:rPr>
@@ -12532,7 +12532,7 @@
             <a:r>
               <a:rPr sz="1300" b="1" i="0" spc="156">
                 <a:solidFill>
-                  <a:srgbClr val="166534"/>
+                  <a:srgbClr val="A5335F"/>
                 </a:solidFill>
                 <a:latin typeface="Verdana"/>
               </a:rPr>
@@ -12558,7 +12558,7 @@
             </a:avLst>
           </a:prstGeom>
           <a:solidFill>
-            <a:srgbClr val="E3F1E7"/>
+            <a:srgbClr val="FCE9F0"/>
           </a:solidFill>
           <a:ln w="12700">
             <a:solidFill>
@@ -12879,7 +12879,7 @@
             <a:r>
               <a:rPr sz="1300" b="1" i="0" spc="156">
                 <a:solidFill>
-                  <a:srgbClr val="166534"/>
+                  <a:srgbClr val="A5335F"/>
                 </a:solidFill>
                 <a:latin typeface="Verdana"/>
               </a:rPr>
@@ -13003,7 +13003,7 @@
             <a:r>
               <a:rPr sz="2300" b="1" i="0">
                 <a:solidFill>
-                  <a:srgbClr val="166534"/>
+                  <a:srgbClr val="A5335F"/>
                 </a:solidFill>
                 <a:latin typeface="Verdana"/>
               </a:rPr>
@@ -13127,7 +13127,7 @@
             <a:r>
               <a:rPr sz="2300" b="1" i="0">
                 <a:solidFill>
-                  <a:srgbClr val="166534"/>
+                  <a:srgbClr val="A5335F"/>
                 </a:solidFill>
                 <a:latin typeface="Verdana"/>
               </a:rPr>
@@ -13251,7 +13251,7 @@
             <a:r>
               <a:rPr sz="2300" b="1" i="0">
                 <a:solidFill>
-                  <a:srgbClr val="166534"/>
+                  <a:srgbClr val="A5335F"/>
                 </a:solidFill>
                 <a:latin typeface="Verdana"/>
               </a:rPr>
@@ -13375,7 +13375,7 @@
             <a:r>
               <a:rPr sz="2300" b="1" i="0">
                 <a:solidFill>
-                  <a:srgbClr val="166534"/>
+                  <a:srgbClr val="A5335F"/>
                 </a:solidFill>
                 <a:latin typeface="Verdana"/>
               </a:rPr>
@@ -13591,7 +13591,7 @@
             <a:r>
               <a:rPr sz="1300" b="1" i="0" spc="156">
                 <a:solidFill>
-                  <a:srgbClr val="166534"/>
+                  <a:srgbClr val="A5335F"/>
                 </a:solidFill>
                 <a:latin typeface="Verdana"/>
               </a:rPr>
@@ -13741,7 +13741,7 @@
             </a:avLst>
           </a:prstGeom>
           <a:solidFill>
-            <a:srgbClr val="E3F1E7"/>
+            <a:srgbClr val="FCE9F0"/>
           </a:solidFill>
           <a:ln>
             <a:noFill/>
@@ -13798,7 +13798,7 @@
             <a:r>
               <a:rPr sz="1500" b="1" i="0">
                 <a:solidFill>
-                  <a:srgbClr val="166534"/>
+                  <a:srgbClr val="A5335F"/>
                 </a:solidFill>
                 <a:latin typeface="Verdana"/>
               </a:rPr>
@@ -13909,7 +13909,7 @@
             </a:avLst>
           </a:prstGeom>
           <a:solidFill>
-            <a:srgbClr val="E3F1E7"/>
+            <a:srgbClr val="FCE9F0"/>
           </a:solidFill>
           <a:ln>
             <a:noFill/>
@@ -13966,7 +13966,7 @@
             <a:r>
               <a:rPr sz="1500" b="1" i="0">
                 <a:solidFill>
-                  <a:srgbClr val="166534"/>
+                  <a:srgbClr val="A5335F"/>
                 </a:solidFill>
                 <a:latin typeface="Verdana"/>
               </a:rPr>
@@ -14077,7 +14077,7 @@
             </a:avLst>
           </a:prstGeom>
           <a:solidFill>
-            <a:srgbClr val="E3F1E7"/>
+            <a:srgbClr val="FCE9F0"/>
           </a:solidFill>
           <a:ln>
             <a:noFill/>
@@ -14134,7 +14134,7 @@
             <a:r>
               <a:rPr sz="1500" b="1" i="0">
                 <a:solidFill>
-                  <a:srgbClr val="166534"/>
+                  <a:srgbClr val="A5335F"/>
                 </a:solidFill>
                 <a:latin typeface="Verdana"/>
               </a:rPr>
@@ -14245,7 +14245,7 @@
             </a:avLst>
           </a:prstGeom>
           <a:solidFill>
-            <a:srgbClr val="E3F1E7"/>
+            <a:srgbClr val="FCE9F0"/>
           </a:solidFill>
           <a:ln>
             <a:noFill/>
@@ -14302,7 +14302,7 @@
             <a:r>
               <a:rPr sz="1500" b="1" i="0">
                 <a:solidFill>
-                  <a:srgbClr val="166534"/>
+                  <a:srgbClr val="A5335F"/>
                 </a:solidFill>
                 <a:latin typeface="Verdana"/>
               </a:rPr>
@@ -14413,7 +14413,7 @@
             </a:avLst>
           </a:prstGeom>
           <a:solidFill>
-            <a:srgbClr val="E3F1E7"/>
+            <a:srgbClr val="FCE9F0"/>
           </a:solidFill>
           <a:ln>
             <a:noFill/>
@@ -14470,7 +14470,7 @@
             <a:r>
               <a:rPr sz="1500" b="1" i="0">
                 <a:solidFill>
-                  <a:srgbClr val="166534"/>
+                  <a:srgbClr val="A5335F"/>
                 </a:solidFill>
                 <a:latin typeface="Verdana"/>
               </a:rPr>
@@ -14581,7 +14581,7 @@
             </a:avLst>
           </a:prstGeom>
           <a:solidFill>
-            <a:srgbClr val="E3F1E7"/>
+            <a:srgbClr val="FCE9F0"/>
           </a:solidFill>
           <a:ln>
             <a:noFill/>
@@ -14638,7 +14638,7 @@
             <a:r>
               <a:rPr sz="1500" b="1" i="0">
                 <a:solidFill>
-                  <a:srgbClr val="166534"/>
+                  <a:srgbClr val="A5335F"/>
                 </a:solidFill>
                 <a:latin typeface="Verdana"/>
               </a:rPr>
@@ -14854,7 +14854,7 @@
             <a:r>
               <a:rPr sz="1300" b="1" i="0" spc="156">
                 <a:solidFill>
-                  <a:srgbClr val="166534"/>
+                  <a:srgbClr val="A5335F"/>
                 </a:solidFill>
                 <a:latin typeface="Verdana"/>
               </a:rPr>
@@ -15004,7 +15004,7 @@
             </a:avLst>
           </a:prstGeom>
           <a:solidFill>
-            <a:srgbClr val="E3F1E7"/>
+            <a:srgbClr val="FCE9F0"/>
           </a:solidFill>
           <a:ln>
             <a:noFill/>
@@ -15061,7 +15061,7 @@
             <a:r>
               <a:rPr sz="1500" b="1" i="0">
                 <a:solidFill>
-                  <a:srgbClr val="166534"/>
+                  <a:srgbClr val="A5335F"/>
                 </a:solidFill>
                 <a:latin typeface="Verdana"/>
               </a:rPr>
@@ -15181,7 +15181,7 @@
             </a:avLst>
           </a:prstGeom>
           <a:solidFill>
-            <a:srgbClr val="E3F1E7"/>
+            <a:srgbClr val="FCE9F0"/>
           </a:solidFill>
           <a:ln>
             <a:noFill/>
@@ -15238,7 +15238,7 @@
             <a:r>
               <a:rPr sz="1500" b="1" i="0">
                 <a:solidFill>
-                  <a:srgbClr val="166534"/>
+                  <a:srgbClr val="A5335F"/>
                 </a:solidFill>
                 <a:latin typeface="Verdana"/>
               </a:rPr>
@@ -15358,7 +15358,7 @@
             </a:avLst>
           </a:prstGeom>
           <a:solidFill>
-            <a:srgbClr val="E3F1E7"/>
+            <a:srgbClr val="FCE9F0"/>
           </a:solidFill>
           <a:ln>
             <a:noFill/>
@@ -15415,7 +15415,7 @@
             <a:r>
               <a:rPr sz="1500" b="1" i="0">
                 <a:solidFill>
-                  <a:srgbClr val="166534"/>
+                  <a:srgbClr val="A5335F"/>
                 </a:solidFill>
                 <a:latin typeface="Verdana"/>
               </a:rPr>
@@ -15535,7 +15535,7 @@
             </a:avLst>
           </a:prstGeom>
           <a:solidFill>
-            <a:srgbClr val="E3F1E7"/>
+            <a:srgbClr val="FCE9F0"/>
           </a:solidFill>
           <a:ln>
             <a:noFill/>
@@ -15592,7 +15592,7 @@
             <a:r>
               <a:rPr sz="1500" b="1" i="0">
                 <a:solidFill>
-                  <a:srgbClr val="166534"/>
+                  <a:srgbClr val="A5335F"/>
                 </a:solidFill>
                 <a:latin typeface="Verdana"/>
               </a:rPr>
@@ -15712,7 +15712,7 @@
             </a:avLst>
           </a:prstGeom>
           <a:solidFill>
-            <a:srgbClr val="E3F1E7"/>
+            <a:srgbClr val="FCE9F0"/>
           </a:solidFill>
           <a:ln>
             <a:noFill/>
@@ -15769,7 +15769,7 @@
             <a:r>
               <a:rPr sz="1500" b="1" i="0">
                 <a:solidFill>
-                  <a:srgbClr val="166534"/>
+                  <a:srgbClr val="A5335F"/>
                 </a:solidFill>
                 <a:latin typeface="Verdana"/>
               </a:rPr>
@@ -15889,7 +15889,7 @@
             </a:avLst>
           </a:prstGeom>
           <a:solidFill>
-            <a:srgbClr val="E3F1E7"/>
+            <a:srgbClr val="FCE9F0"/>
           </a:solidFill>
           <a:ln>
             <a:noFill/>
@@ -15946,7 +15946,7 @@
             <a:r>
               <a:rPr sz="1500" b="1" i="0">
                 <a:solidFill>
-                  <a:srgbClr val="166534"/>
+                  <a:srgbClr val="A5335F"/>
                 </a:solidFill>
                 <a:latin typeface="Verdana"/>
               </a:rPr>
@@ -16171,7 +16171,7 @@
             <a:r>
               <a:rPr sz="1300" b="1" i="0" spc="156">
                 <a:solidFill>
-                  <a:srgbClr val="166534"/>
+                  <a:srgbClr val="A5335F"/>
                 </a:solidFill>
                 <a:latin typeface="Verdana"/>
               </a:rPr>
@@ -16321,7 +16321,7 @@
             </a:avLst>
           </a:prstGeom>
           <a:solidFill>
-            <a:srgbClr val="E3F1E7"/>
+            <a:srgbClr val="FCE9F0"/>
           </a:solidFill>
           <a:ln>
             <a:noFill/>
@@ -16378,7 +16378,7 @@
             <a:r>
               <a:rPr sz="1500" b="1" i="0">
                 <a:solidFill>
-                  <a:srgbClr val="166534"/>
+                  <a:srgbClr val="A5335F"/>
                 </a:solidFill>
                 <a:latin typeface="Verdana"/>
               </a:rPr>
@@ -16489,7 +16489,7 @@
             </a:avLst>
           </a:prstGeom>
           <a:solidFill>
-            <a:srgbClr val="E3F1E7"/>
+            <a:srgbClr val="FCE9F0"/>
           </a:solidFill>
           <a:ln>
             <a:noFill/>
@@ -16546,7 +16546,7 @@
             <a:r>
               <a:rPr sz="1500" b="1" i="0">
                 <a:solidFill>
-                  <a:srgbClr val="166534"/>
+                  <a:srgbClr val="A5335F"/>
                 </a:solidFill>
                 <a:latin typeface="Verdana"/>
               </a:rPr>
@@ -16657,7 +16657,7 @@
             </a:avLst>
           </a:prstGeom>
           <a:solidFill>
-            <a:srgbClr val="E3F1E7"/>
+            <a:srgbClr val="FCE9F0"/>
           </a:solidFill>
           <a:ln>
             <a:noFill/>
@@ -16714,7 +16714,7 @@
             <a:r>
               <a:rPr sz="1500" b="1" i="0">
                 <a:solidFill>
-                  <a:srgbClr val="166534"/>
+                  <a:srgbClr val="A5335F"/>
                 </a:solidFill>
                 <a:latin typeface="Verdana"/>
               </a:rPr>
@@ -16825,7 +16825,7 @@
             </a:avLst>
           </a:prstGeom>
           <a:solidFill>
-            <a:srgbClr val="E3F1E7"/>
+            <a:srgbClr val="FCE9F0"/>
           </a:solidFill>
           <a:ln>
             <a:noFill/>
@@ -16882,7 +16882,7 @@
             <a:r>
               <a:rPr sz="1500" b="1" i="0">
                 <a:solidFill>
-                  <a:srgbClr val="166534"/>
+                  <a:srgbClr val="A5335F"/>
                 </a:solidFill>
                 <a:latin typeface="Verdana"/>
               </a:rPr>
@@ -16993,7 +16993,7 @@
             </a:avLst>
           </a:prstGeom>
           <a:solidFill>
-            <a:srgbClr val="E3F1E7"/>
+            <a:srgbClr val="FCE9F0"/>
           </a:solidFill>
           <a:ln>
             <a:noFill/>
@@ -17050,7 +17050,7 @@
             <a:r>
               <a:rPr sz="1500" b="1" i="0">
                 <a:solidFill>
-                  <a:srgbClr val="166534"/>
+                  <a:srgbClr val="A5335F"/>
                 </a:solidFill>
                 <a:latin typeface="Verdana"/>
               </a:rPr>
@@ -17266,7 +17266,7 @@
             <a:r>
               <a:rPr sz="1300" b="1" i="0" spc="156">
                 <a:solidFill>
-                  <a:srgbClr val="166534"/>
+                  <a:srgbClr val="A5335F"/>
                 </a:solidFill>
                 <a:latin typeface="Verdana"/>
               </a:rPr>
@@ -17416,7 +17416,7 @@
             </a:avLst>
           </a:prstGeom>
           <a:solidFill>
-            <a:srgbClr val="E3F1E7"/>
+            <a:srgbClr val="FCE9F0"/>
           </a:solidFill>
           <a:ln>
             <a:noFill/>
@@ -17473,7 +17473,7 @@
             <a:r>
               <a:rPr sz="1500" b="1" i="0">
                 <a:solidFill>
-                  <a:srgbClr val="166534"/>
+                  <a:srgbClr val="A5335F"/>
                 </a:solidFill>
                 <a:latin typeface="Verdana"/>
               </a:rPr>
@@ -17593,7 +17593,7 @@
             </a:avLst>
           </a:prstGeom>
           <a:solidFill>
-            <a:srgbClr val="E3F1E7"/>
+            <a:srgbClr val="FCE9F0"/>
           </a:solidFill>
           <a:ln>
             <a:noFill/>
@@ -17650,7 +17650,7 @@
             <a:r>
               <a:rPr sz="1500" b="1" i="0">
                 <a:solidFill>
-                  <a:srgbClr val="166534"/>
+                  <a:srgbClr val="A5335F"/>
                 </a:solidFill>
                 <a:latin typeface="Verdana"/>
               </a:rPr>
@@ -17770,7 +17770,7 @@
             </a:avLst>
           </a:prstGeom>
           <a:solidFill>
-            <a:srgbClr val="E3F1E7"/>
+            <a:srgbClr val="FCE9F0"/>
           </a:solidFill>
           <a:ln>
             <a:noFill/>
@@ -17827,7 +17827,7 @@
             <a:r>
               <a:rPr sz="1500" b="1" i="0">
                 <a:solidFill>
-                  <a:srgbClr val="166534"/>
+                  <a:srgbClr val="A5335F"/>
                 </a:solidFill>
                 <a:latin typeface="Verdana"/>
               </a:rPr>
@@ -17947,7 +17947,7 @@
             </a:avLst>
           </a:prstGeom>
           <a:solidFill>
-            <a:srgbClr val="E3F1E7"/>
+            <a:srgbClr val="FCE9F0"/>
           </a:solidFill>
           <a:ln>
             <a:noFill/>
@@ -18004,7 +18004,7 @@
             <a:r>
               <a:rPr sz="1500" b="1" i="0">
                 <a:solidFill>
-                  <a:srgbClr val="166534"/>
+                  <a:srgbClr val="A5335F"/>
                 </a:solidFill>
                 <a:latin typeface="Verdana"/>
               </a:rPr>
@@ -18124,7 +18124,7 @@
             </a:avLst>
           </a:prstGeom>
           <a:solidFill>
-            <a:srgbClr val="E3F1E7"/>
+            <a:srgbClr val="FCE9F0"/>
           </a:solidFill>
           <a:ln>
             <a:noFill/>
@@ -18181,7 +18181,7 @@
             <a:r>
               <a:rPr sz="1500" b="1" i="0">
                 <a:solidFill>
-                  <a:srgbClr val="166534"/>
+                  <a:srgbClr val="A5335F"/>
                 </a:solidFill>
                 <a:latin typeface="Verdana"/>
               </a:rPr>

--- a/assets/powerpoints/module-meteo/B2-les-chiffres-du-bulletin.pptx
+++ b/assets/powerpoints/module-meteo/B2-les-chiffres-du-bulletin.pptx
@@ -12883,7 +12883,7 @@
                 </a:solidFill>
                 <a:latin typeface="Verdana"/>
               </a:rPr>
-              <a:t>EN APPRENDRE PLUS</a:t>
+              <a:t>OUVRIR LA MINI-LEÇON</a:t>
             </a:r>
           </a:p>
         </p:txBody>
